--- a/Docker.pptx
+++ b/Docker.pptx
@@ -42,9 +42,10 @@
     <p:sldId id="294" r:id="rId36"/>
     <p:sldId id="284" r:id="rId37"/>
     <p:sldId id="295" r:id="rId38"/>
-    <p:sldId id="277" r:id="rId39"/>
-    <p:sldId id="287" r:id="rId40"/>
-    <p:sldId id="280" r:id="rId41"/>
+    <p:sldId id="296" r:id="rId39"/>
+    <p:sldId id="277" r:id="rId40"/>
+    <p:sldId id="287" r:id="rId41"/>
+    <p:sldId id="280" r:id="rId42"/>
   </p:sldIdLst>
   <p:sldSz cx="12192000" cy="6858000"/>
   <p:notesSz cx="6858000" cy="9144000"/>
@@ -298,7 +299,7 @@
           <a:p>
             <a:fld id="{02AC24A9-CCB6-4F8D-B8DB-C2F3692CFA5A}" type="datetimeFigureOut">
               <a:rPr lang="en-US" smtClean="0"/>
-              <a:t>10/27/2024</a:t>
+              <a:t>5/17/2026</a:t>
             </a:fld>
             <a:endParaRPr lang="en-US"/>
           </a:p>
@@ -496,7 +497,7 @@
           <a:p>
             <a:fld id="{02AC24A9-CCB6-4F8D-B8DB-C2F3692CFA5A}" type="datetimeFigureOut">
               <a:rPr lang="en-US" smtClean="0"/>
-              <a:t>10/27/2024</a:t>
+              <a:t>5/17/2026</a:t>
             </a:fld>
             <a:endParaRPr lang="en-US"/>
           </a:p>
@@ -704,7 +705,7 @@
           <a:p>
             <a:fld id="{02AC24A9-CCB6-4F8D-B8DB-C2F3692CFA5A}" type="datetimeFigureOut">
               <a:rPr lang="en-US" smtClean="0"/>
-              <a:t>10/27/2024</a:t>
+              <a:t>5/17/2026</a:t>
             </a:fld>
             <a:endParaRPr lang="en-US"/>
           </a:p>
@@ -925,7 +926,7 @@
           <a:p>
             <a:fld id="{02AC24A9-CCB6-4F8D-B8DB-C2F3692CFA5A}" type="datetimeFigureOut">
               <a:rPr lang="en-US" smtClean="0"/>
-              <a:t>10/27/2024</a:t>
+              <a:t>5/17/2026</a:t>
             </a:fld>
             <a:endParaRPr lang="en-US"/>
           </a:p>
@@ -1256,7 +1257,7 @@
           <a:p>
             <a:fld id="{02AC24A9-CCB6-4F8D-B8DB-C2F3692CFA5A}" type="datetimeFigureOut">
               <a:rPr lang="en-US" smtClean="0"/>
-              <a:t>10/27/2024</a:t>
+              <a:t>5/17/2026</a:t>
             </a:fld>
             <a:endParaRPr lang="en-US"/>
           </a:p>
@@ -1521,7 +1522,7 @@
           <a:p>
             <a:fld id="{02AC24A9-CCB6-4F8D-B8DB-C2F3692CFA5A}" type="datetimeFigureOut">
               <a:rPr lang="en-US" smtClean="0"/>
-              <a:t>10/27/2024</a:t>
+              <a:t>5/17/2026</a:t>
             </a:fld>
             <a:endParaRPr lang="en-US"/>
           </a:p>
@@ -1933,7 +1934,7 @@
           <a:p>
             <a:fld id="{02AC24A9-CCB6-4F8D-B8DB-C2F3692CFA5A}" type="datetimeFigureOut">
               <a:rPr lang="en-US" smtClean="0"/>
-              <a:t>10/27/2024</a:t>
+              <a:t>5/17/2026</a:t>
             </a:fld>
             <a:endParaRPr lang="en-US"/>
           </a:p>
@@ -2074,7 +2075,7 @@
           <a:p>
             <a:fld id="{02AC24A9-CCB6-4F8D-B8DB-C2F3692CFA5A}" type="datetimeFigureOut">
               <a:rPr lang="en-US" smtClean="0"/>
-              <a:t>10/27/2024</a:t>
+              <a:t>5/17/2026</a:t>
             </a:fld>
             <a:endParaRPr lang="en-US"/>
           </a:p>
@@ -2187,7 +2188,7 @@
           <a:p>
             <a:fld id="{02AC24A9-CCB6-4F8D-B8DB-C2F3692CFA5A}" type="datetimeFigureOut">
               <a:rPr lang="en-US" smtClean="0"/>
-              <a:t>10/27/2024</a:t>
+              <a:t>5/17/2026</a:t>
             </a:fld>
             <a:endParaRPr lang="en-US"/>
           </a:p>
@@ -2498,7 +2499,7 @@
           <a:p>
             <a:fld id="{02AC24A9-CCB6-4F8D-B8DB-C2F3692CFA5A}" type="datetimeFigureOut">
               <a:rPr lang="en-US" smtClean="0"/>
-              <a:t>10/27/2024</a:t>
+              <a:t>5/17/2026</a:t>
             </a:fld>
             <a:endParaRPr lang="en-US"/>
           </a:p>
@@ -2786,7 +2787,7 @@
           <a:p>
             <a:fld id="{02AC24A9-CCB6-4F8D-B8DB-C2F3692CFA5A}" type="datetimeFigureOut">
               <a:rPr lang="en-US" smtClean="0"/>
-              <a:t>10/27/2024</a:t>
+              <a:t>5/17/2026</a:t>
             </a:fld>
             <a:endParaRPr lang="en-US"/>
           </a:p>
@@ -3027,7 +3028,7 @@
           <a:p>
             <a:fld id="{02AC24A9-CCB6-4F8D-B8DB-C2F3692CFA5A}" type="datetimeFigureOut">
               <a:rPr lang="en-US" smtClean="0"/>
-              <a:t>10/27/2024</a:t>
+              <a:t>5/17/2026</a:t>
             </a:fld>
             <a:endParaRPr lang="en-US"/>
           </a:p>
@@ -19459,7 +19460,7 @@
             </a:r>
             <a:r>
               <a:rPr lang="en-US" dirty="0" err="1"/>
-              <a:t>pultl</a:t>
+              <a:t>pullt</a:t>
             </a:r>
             <a:r>
               <a:rPr lang="en-US" dirty="0"/>
@@ -19541,7 +19542,7 @@
               <a:rPr lang="en-US" dirty="0">
                 <a:hlinkClick r:id="rId2"/>
               </a:rPr>
-              <a:t>https://containrrr.dev/watchtower/</a:t>
+              <a:t>https://watchtower.nickfedor.com/</a:t>
             </a:r>
             <a:r>
               <a:rPr lang="en-US" dirty="0"/>
@@ -19642,21 +19643,40 @@
         </p:spPr>
         <p:txBody>
           <a:bodyPr>
-            <a:normAutofit fontScale="92500" lnSpcReduction="10000"/>
+            <a:normAutofit fontScale="92500"/>
           </a:bodyPr>
           <a:lstStyle/>
           <a:p>
             <a:r>
               <a:rPr lang="de-DE" dirty="0"/>
-              <a:t>Dokumentation unter </a:t>
+              <a:t>Homepage </a:t>
             </a:r>
             <a:r>
               <a:rPr lang="de-DE" dirty="0">
                 <a:hlinkClick r:id="rId2"/>
               </a:rPr>
-              <a:t>https://containrrr.dev/watchtower/</a:t>
-            </a:r>
-            <a:endParaRPr lang="de-DE" dirty="0"/>
+              <a:t>https://hub.docker.com/r/nickfedor/watchtower</a:t>
+            </a:r>
+            <a:r>
+              <a:rPr lang="de-DE" dirty="0"/>
+              <a:t> </a:t>
+            </a:r>
+          </a:p>
+          <a:p>
+            <a:r>
+              <a:rPr lang="de-DE" dirty="0"/>
+              <a:t>Dokumentation: </a:t>
+            </a:r>
+            <a:r>
+              <a:rPr lang="de-DE" dirty="0">
+                <a:hlinkClick r:id="rId3"/>
+              </a:rPr>
+              <a:t>https://watchtower.nickfedor.com/</a:t>
+            </a:r>
+            <a:r>
+              <a:rPr lang="de-DE" dirty="0"/>
+              <a:t> </a:t>
+            </a:r>
           </a:p>
           <a:p>
             <a:r>
@@ -19862,7 +19882,7 @@
                 <a:latin typeface="Courier New" panose="02070309020205020404" pitchFamily="49" charset="0"/>
                 <a:cs typeface="Courier New" panose="02070309020205020404" pitchFamily="49" charset="0"/>
               </a:rPr>
-              <a:t>containrrr</a:t>
+              <a:t>nickfedor</a:t>
             </a:r>
             <a:r>
               <a:rPr lang="de-DE" sz="2000" b="1" dirty="0">
@@ -19911,12 +19931,6 @@
               <a:latin typeface="Courier New" panose="02070309020205020404" pitchFamily="49" charset="0"/>
               <a:cs typeface="Courier New" panose="02070309020205020404" pitchFamily="49" charset="0"/>
             </a:endParaRPr>
-          </a:p>
-          <a:p>
-            <a:r>
-              <a:rPr lang="de-DE" dirty="0"/>
-              <a:t>Optional kann auch der/die Namen der zu überwachenden Container angegeben werden (nicht die Namen der Images!)</a:t>
-            </a:r>
           </a:p>
           <a:p>
             <a:r>
@@ -20316,7 +20330,7 @@
                 <a:ea typeface="+mn-ea"/>
                 <a:cs typeface="Courier New" panose="02070309020205020404" pitchFamily="49" charset="0"/>
               </a:rPr>
-              <a:t>containrrr</a:t>
+              <a:t>nickfedor</a:t>
             </a:r>
             <a:r>
               <a:rPr kumimoji="0" lang="de-DE" sz="1800" b="1" i="0" u="none" strike="noStrike" kern="1200" cap="none" spc="0" normalizeH="0" baseline="0" noProof="0" dirty="0">
@@ -20552,15 +20566,7 @@
           <a:p>
             <a:r>
               <a:rPr lang="de-DE" dirty="0"/>
-              <a:t>Benachrichtigungen (</a:t>
-            </a:r>
-            <a:r>
-              <a:rPr lang="de-DE" dirty="0" err="1"/>
-              <a:t>Discord</a:t>
-            </a:r>
-            <a:r>
-              <a:rPr lang="de-DE" dirty="0"/>
-              <a:t>, Email, Slack, </a:t>
+              <a:t>Benachrichtigungen (Discord, Email, Slack, </a:t>
             </a:r>
             <a:r>
               <a:rPr lang="de-DE" dirty="0" err="1"/>
@@ -20576,7 +20582,7 @@
             </a:r>
             <a:r>
               <a:rPr lang="de-DE" dirty="0"/>
-              <a:t>-Website! </a:t>
+              <a:t>-Dokumentation! </a:t>
             </a:r>
           </a:p>
         </p:txBody>
@@ -20596,15 +20602,15 @@
           <p:nvPr/>
         </p:nvPicPr>
         <p:blipFill>
-          <a:blip r:embed="rId3"/>
+          <a:blip r:embed="rId4"/>
           <a:stretch>
             <a:fillRect/>
           </a:stretch>
         </p:blipFill>
         <p:spPr>
           <a:xfrm>
-            <a:off x="9969450" y="1130530"/>
-            <a:ext cx="1363475" cy="1370676"/>
+            <a:off x="10189456" y="1130529"/>
+            <a:ext cx="1647868" cy="1656571"/>
           </a:xfrm>
           <a:prstGeom prst="rect">
             <a:avLst/>
@@ -20625,6 +20631,594 @@
 </file>
 
 <file path=ppt/slides/slide38.xml><?xml version="1.0" encoding="utf-8"?>
+<p:sld xmlns:a="http://schemas.openxmlformats.org/drawingml/2006/main" xmlns:r="http://schemas.openxmlformats.org/officeDocument/2006/relationships" xmlns:p="http://schemas.openxmlformats.org/presentationml/2006/main">
+  <p:cSld>
+    <p:spTree>
+      <p:nvGrpSpPr>
+        <p:cNvPr id="1" name=""/>
+        <p:cNvGrpSpPr/>
+        <p:nvPr/>
+      </p:nvGrpSpPr>
+      <p:grpSpPr>
+        <a:xfrm>
+          <a:off x="0" y="0"/>
+          <a:ext cx="0" cy="0"/>
+          <a:chOff x="0" y="0"/>
+          <a:chExt cx="0" cy="0"/>
+        </a:xfrm>
+      </p:grpSpPr>
+      <p:sp>
+        <p:nvSpPr>
+          <p:cNvPr id="2" name="Titel 1">
+            <a:extLst>
+              <a:ext uri="{FF2B5EF4-FFF2-40B4-BE49-F238E27FC236}">
+                <a16:creationId xmlns:a16="http://schemas.microsoft.com/office/drawing/2014/main" id="{A851A1AB-F825-1702-8759-1D1996985274}"/>
+              </a:ext>
+            </a:extLst>
+          </p:cNvPr>
+          <p:cNvSpPr>
+            <a:spLocks noGrp="1"/>
+          </p:cNvSpPr>
+          <p:nvPr>
+            <p:ph type="title"/>
+          </p:nvPr>
+        </p:nvSpPr>
+        <p:spPr>
+          <a:xfrm>
+            <a:off x="838200" y="0"/>
+            <a:ext cx="10515600" cy="1325563"/>
+          </a:xfrm>
+        </p:spPr>
+        <p:txBody>
+          <a:bodyPr/>
+          <a:lstStyle/>
+          <a:p>
+            <a:r>
+              <a:rPr lang="de-DE" dirty="0" err="1"/>
+              <a:t>docker-compose.yml</a:t>
+            </a:r>
+            <a:r>
+              <a:rPr lang="de-DE" dirty="0"/>
+              <a:t> für </a:t>
+            </a:r>
+            <a:r>
+              <a:rPr lang="de-DE" dirty="0" err="1"/>
+              <a:t>Watchtower</a:t>
+            </a:r>
+            <a:endParaRPr lang="de-DE" dirty="0"/>
+          </a:p>
+        </p:txBody>
+      </p:sp>
+      <p:sp>
+        <p:nvSpPr>
+          <p:cNvPr id="3" name="Inhaltsplatzhalter 2">
+            <a:extLst>
+              <a:ext uri="{FF2B5EF4-FFF2-40B4-BE49-F238E27FC236}">
+                <a16:creationId xmlns:a16="http://schemas.microsoft.com/office/drawing/2014/main" id="{7C07ADD0-5C04-EEF7-69BE-3514403A7DB9}"/>
+              </a:ext>
+            </a:extLst>
+          </p:cNvPr>
+          <p:cNvSpPr>
+            <a:spLocks noGrp="1"/>
+          </p:cNvSpPr>
+          <p:nvPr>
+            <p:ph idx="1"/>
+          </p:nvPr>
+        </p:nvSpPr>
+        <p:spPr>
+          <a:xfrm>
+            <a:off x="838200" y="1148156"/>
+            <a:ext cx="10515600" cy="5709844"/>
+          </a:xfrm>
+        </p:spPr>
+        <p:txBody>
+          <a:bodyPr>
+            <a:normAutofit/>
+          </a:bodyPr>
+          <a:lstStyle/>
+          <a:p>
+            <a:r>
+              <a:rPr lang="de-DE" dirty="0"/>
+              <a:t>Ermöglicht komfortable Konfiguration von Email-Benachrichtigungen und anderen </a:t>
+            </a:r>
+            <a:r>
+              <a:rPr lang="de-DE" dirty="0" err="1"/>
+              <a:t>Watchtower</a:t>
+            </a:r>
+            <a:r>
+              <a:rPr lang="de-DE" dirty="0"/>
+              <a:t>-Einstellungen</a:t>
+            </a:r>
+          </a:p>
+        </p:txBody>
+      </p:sp>
+      <p:sp>
+        <p:nvSpPr>
+          <p:cNvPr id="6" name="Textfeld 5">
+            <a:extLst>
+              <a:ext uri="{FF2B5EF4-FFF2-40B4-BE49-F238E27FC236}">
+                <a16:creationId xmlns:a16="http://schemas.microsoft.com/office/drawing/2014/main" id="{9C915A96-7094-6BA9-4122-EC9466F8C7CE}"/>
+              </a:ext>
+            </a:extLst>
+          </p:cNvPr>
+          <p:cNvSpPr txBox="1"/>
+          <p:nvPr/>
+        </p:nvSpPr>
+        <p:spPr>
+          <a:xfrm>
+            <a:off x="1072529" y="2145059"/>
+            <a:ext cx="9900272" cy="4524315"/>
+          </a:xfrm>
+          <a:prstGeom prst="rect">
+            <a:avLst/>
+          </a:prstGeom>
+          <a:noFill/>
+          <a:ln>
+            <a:solidFill>
+              <a:schemeClr val="bg1">
+                <a:lumMod val="50000"/>
+              </a:schemeClr>
+            </a:solidFill>
+          </a:ln>
+        </p:spPr>
+        <p:txBody>
+          <a:bodyPr wrap="square" rtlCol="0">
+            <a:spAutoFit/>
+          </a:bodyPr>
+          <a:lstStyle/>
+          <a:p>
+            <a:r>
+              <a:rPr lang="de-DE" sz="1600" b="1" dirty="0" err="1">
+                <a:latin typeface="Courier New" panose="02070309020205020404" pitchFamily="49" charset="0"/>
+                <a:cs typeface="Courier New" panose="02070309020205020404" pitchFamily="49" charset="0"/>
+              </a:rPr>
+              <a:t>services</a:t>
+            </a:r>
+            <a:r>
+              <a:rPr lang="de-DE" sz="1600" b="1" dirty="0">
+                <a:latin typeface="Courier New" panose="02070309020205020404" pitchFamily="49" charset="0"/>
+                <a:cs typeface="Courier New" panose="02070309020205020404" pitchFamily="49" charset="0"/>
+              </a:rPr>
+              <a:t>:</a:t>
+            </a:r>
+          </a:p>
+          <a:p>
+            <a:r>
+              <a:rPr lang="de-DE" sz="1600" b="1" dirty="0">
+                <a:latin typeface="Courier New" panose="02070309020205020404" pitchFamily="49" charset="0"/>
+                <a:cs typeface="Courier New" panose="02070309020205020404" pitchFamily="49" charset="0"/>
+              </a:rPr>
+              <a:t>  </a:t>
+            </a:r>
+            <a:r>
+              <a:rPr lang="de-DE" sz="1600" b="1" dirty="0" err="1">
+                <a:latin typeface="Courier New" panose="02070309020205020404" pitchFamily="49" charset="0"/>
+                <a:cs typeface="Courier New" panose="02070309020205020404" pitchFamily="49" charset="0"/>
+              </a:rPr>
+              <a:t>watchtower</a:t>
+            </a:r>
+            <a:r>
+              <a:rPr lang="de-DE" sz="1600" b="1" dirty="0">
+                <a:latin typeface="Courier New" panose="02070309020205020404" pitchFamily="49" charset="0"/>
+                <a:cs typeface="Courier New" panose="02070309020205020404" pitchFamily="49" charset="0"/>
+              </a:rPr>
+              <a:t>:</a:t>
+            </a:r>
+          </a:p>
+          <a:p>
+            <a:r>
+              <a:rPr lang="de-DE" sz="1600" b="1" dirty="0">
+                <a:latin typeface="Courier New" panose="02070309020205020404" pitchFamily="49" charset="0"/>
+                <a:cs typeface="Courier New" panose="02070309020205020404" pitchFamily="49" charset="0"/>
+              </a:rPr>
+              <a:t>    </a:t>
+            </a:r>
+            <a:r>
+              <a:rPr lang="de-DE" sz="1600" b="1" dirty="0" err="1">
+                <a:latin typeface="Courier New" panose="02070309020205020404" pitchFamily="49" charset="0"/>
+                <a:cs typeface="Courier New" panose="02070309020205020404" pitchFamily="49" charset="0"/>
+              </a:rPr>
+              <a:t>image</a:t>
+            </a:r>
+            <a:r>
+              <a:rPr lang="de-DE" sz="1600" b="1" dirty="0">
+                <a:latin typeface="Courier New" panose="02070309020205020404" pitchFamily="49" charset="0"/>
+                <a:cs typeface="Courier New" panose="02070309020205020404" pitchFamily="49" charset="0"/>
+              </a:rPr>
+              <a:t>: </a:t>
+            </a:r>
+            <a:r>
+              <a:rPr lang="de-DE" sz="1600" b="1" dirty="0" err="1">
+                <a:latin typeface="Courier New" panose="02070309020205020404" pitchFamily="49" charset="0"/>
+                <a:cs typeface="Courier New" panose="02070309020205020404" pitchFamily="49" charset="0"/>
+              </a:rPr>
+              <a:t>nickfedor</a:t>
+            </a:r>
+            <a:r>
+              <a:rPr lang="de-DE" sz="1600" b="1" dirty="0">
+                <a:latin typeface="Courier New" panose="02070309020205020404" pitchFamily="49" charset="0"/>
+                <a:cs typeface="Courier New" panose="02070309020205020404" pitchFamily="49" charset="0"/>
+              </a:rPr>
+              <a:t>/</a:t>
+            </a:r>
+            <a:r>
+              <a:rPr lang="de-DE" sz="1600" b="1" dirty="0" err="1">
+                <a:latin typeface="Courier New" panose="02070309020205020404" pitchFamily="49" charset="0"/>
+                <a:cs typeface="Courier New" panose="02070309020205020404" pitchFamily="49" charset="0"/>
+              </a:rPr>
+              <a:t>watchtower:latest</a:t>
+            </a:r>
+            <a:endParaRPr lang="de-DE" sz="1600" b="1" dirty="0">
+              <a:latin typeface="Courier New" panose="02070309020205020404" pitchFamily="49" charset="0"/>
+              <a:cs typeface="Courier New" panose="02070309020205020404" pitchFamily="49" charset="0"/>
+            </a:endParaRPr>
+          </a:p>
+          <a:p>
+            <a:r>
+              <a:rPr lang="de-DE" sz="1600" b="1" dirty="0">
+                <a:latin typeface="Courier New" panose="02070309020205020404" pitchFamily="49" charset="0"/>
+                <a:cs typeface="Courier New" panose="02070309020205020404" pitchFamily="49" charset="0"/>
+              </a:rPr>
+              <a:t>    </a:t>
+            </a:r>
+            <a:r>
+              <a:rPr lang="de-DE" sz="1600" b="1" dirty="0" err="1">
+                <a:latin typeface="Courier New" panose="02070309020205020404" pitchFamily="49" charset="0"/>
+                <a:cs typeface="Courier New" panose="02070309020205020404" pitchFamily="49" charset="0"/>
+              </a:rPr>
+              <a:t>container_name</a:t>
+            </a:r>
+            <a:r>
+              <a:rPr lang="de-DE" sz="1600" b="1" dirty="0">
+                <a:latin typeface="Courier New" panose="02070309020205020404" pitchFamily="49" charset="0"/>
+                <a:cs typeface="Courier New" panose="02070309020205020404" pitchFamily="49" charset="0"/>
+              </a:rPr>
+              <a:t>: </a:t>
+            </a:r>
+            <a:r>
+              <a:rPr lang="de-DE" sz="1600" b="1" dirty="0" err="1">
+                <a:latin typeface="Courier New" panose="02070309020205020404" pitchFamily="49" charset="0"/>
+                <a:cs typeface="Courier New" panose="02070309020205020404" pitchFamily="49" charset="0"/>
+              </a:rPr>
+              <a:t>watchtower</a:t>
+            </a:r>
+            <a:endParaRPr lang="de-DE" sz="1600" b="1" dirty="0">
+              <a:latin typeface="Courier New" panose="02070309020205020404" pitchFamily="49" charset="0"/>
+              <a:cs typeface="Courier New" panose="02070309020205020404" pitchFamily="49" charset="0"/>
+            </a:endParaRPr>
+          </a:p>
+          <a:p>
+            <a:r>
+              <a:rPr lang="de-DE" sz="1600" b="1" dirty="0">
+                <a:latin typeface="Courier New" panose="02070309020205020404" pitchFamily="49" charset="0"/>
+                <a:cs typeface="Courier New" panose="02070309020205020404" pitchFamily="49" charset="0"/>
+              </a:rPr>
+              <a:t>    </a:t>
+            </a:r>
+            <a:r>
+              <a:rPr lang="de-DE" sz="1600" b="1" dirty="0" err="1">
+                <a:latin typeface="Courier New" panose="02070309020205020404" pitchFamily="49" charset="0"/>
+                <a:cs typeface="Courier New" panose="02070309020205020404" pitchFamily="49" charset="0"/>
+              </a:rPr>
+              <a:t>restart</a:t>
+            </a:r>
+            <a:r>
+              <a:rPr lang="de-DE" sz="1600" b="1" dirty="0">
+                <a:latin typeface="Courier New" panose="02070309020205020404" pitchFamily="49" charset="0"/>
+                <a:cs typeface="Courier New" panose="02070309020205020404" pitchFamily="49" charset="0"/>
+              </a:rPr>
+              <a:t>: </a:t>
+            </a:r>
+            <a:r>
+              <a:rPr lang="de-DE" sz="1600" b="1" dirty="0" err="1">
+                <a:latin typeface="Courier New" panose="02070309020205020404" pitchFamily="49" charset="0"/>
+                <a:cs typeface="Courier New" panose="02070309020205020404" pitchFamily="49" charset="0"/>
+              </a:rPr>
+              <a:t>unless-stopped</a:t>
+            </a:r>
+            <a:endParaRPr lang="de-DE" sz="1600" b="1" dirty="0">
+              <a:latin typeface="Courier New" panose="02070309020205020404" pitchFamily="49" charset="0"/>
+              <a:cs typeface="Courier New" panose="02070309020205020404" pitchFamily="49" charset="0"/>
+            </a:endParaRPr>
+          </a:p>
+          <a:p>
+            <a:r>
+              <a:rPr lang="de-DE" sz="1600" b="1" dirty="0">
+                <a:latin typeface="Courier New" panose="02070309020205020404" pitchFamily="49" charset="0"/>
+                <a:cs typeface="Courier New" panose="02070309020205020404" pitchFamily="49" charset="0"/>
+              </a:rPr>
+              <a:t>    </a:t>
+            </a:r>
+            <a:r>
+              <a:rPr lang="de-DE" sz="1600" b="1" dirty="0" err="1">
+                <a:latin typeface="Courier New" panose="02070309020205020404" pitchFamily="49" charset="0"/>
+                <a:cs typeface="Courier New" panose="02070309020205020404" pitchFamily="49" charset="0"/>
+              </a:rPr>
+              <a:t>environment</a:t>
+            </a:r>
+            <a:r>
+              <a:rPr lang="de-DE" sz="1600" b="1" dirty="0">
+                <a:latin typeface="Courier New" panose="02070309020205020404" pitchFamily="49" charset="0"/>
+                <a:cs typeface="Courier New" panose="02070309020205020404" pitchFamily="49" charset="0"/>
+              </a:rPr>
+              <a:t>:</a:t>
+            </a:r>
+          </a:p>
+          <a:p>
+            <a:r>
+              <a:rPr lang="de-DE" sz="1600" b="1" dirty="0">
+                <a:latin typeface="Courier New" panose="02070309020205020404" pitchFamily="49" charset="0"/>
+                <a:cs typeface="Courier New" panose="02070309020205020404" pitchFamily="49" charset="0"/>
+              </a:rPr>
+              <a:t>      WATCHTOWER_NOTIFICATIONS: email</a:t>
+            </a:r>
+          </a:p>
+          <a:p>
+            <a:r>
+              <a:rPr lang="de-DE" sz="1600" b="1" dirty="0">
+                <a:latin typeface="Courier New" panose="02070309020205020404" pitchFamily="49" charset="0"/>
+                <a:cs typeface="Courier New" panose="02070309020205020404" pitchFamily="49" charset="0"/>
+              </a:rPr>
+              <a:t>      WATCHTOWER_NOTIFICATION_EMAIL_FROM: mywatchtower@rothnet.org</a:t>
+            </a:r>
+          </a:p>
+          <a:p>
+            <a:r>
+              <a:rPr lang="de-DE" sz="1600" b="1" dirty="0">
+                <a:latin typeface="Courier New" panose="02070309020205020404" pitchFamily="49" charset="0"/>
+                <a:cs typeface="Courier New" panose="02070309020205020404" pitchFamily="49" charset="0"/>
+              </a:rPr>
+              <a:t>      WATCHTOWER_NOTIFICATION_EMAIL_TO: info@rothnet.org</a:t>
+            </a:r>
+          </a:p>
+          <a:p>
+            <a:r>
+              <a:rPr lang="de-DE" sz="1600" b="1" dirty="0">
+                <a:latin typeface="Courier New" panose="02070309020205020404" pitchFamily="49" charset="0"/>
+                <a:cs typeface="Courier New" panose="02070309020205020404" pitchFamily="49" charset="0"/>
+              </a:rPr>
+              <a:t>      WATCHTOWER_NOTIFICATION_EMAIL_SERVER: sslout.df.eu</a:t>
+            </a:r>
+          </a:p>
+          <a:p>
+            <a:r>
+              <a:rPr lang="de-DE" sz="1600" b="1" dirty="0">
+                <a:latin typeface="Courier New" panose="02070309020205020404" pitchFamily="49" charset="0"/>
+                <a:cs typeface="Courier New" panose="02070309020205020404" pitchFamily="49" charset="0"/>
+              </a:rPr>
+              <a:t>      WATCHTOWER_NOTIFICATION_EMAIL_SERVER_PORT: 465</a:t>
+            </a:r>
+          </a:p>
+          <a:p>
+            <a:r>
+              <a:rPr lang="de-DE" sz="1600" b="1" dirty="0">
+                <a:latin typeface="Courier New" panose="02070309020205020404" pitchFamily="49" charset="0"/>
+                <a:cs typeface="Courier New" panose="02070309020205020404" pitchFamily="49" charset="0"/>
+              </a:rPr>
+              <a:t>      WATCHTOWER_NOTIFICATION_EMAIL_SUBJECTTAG: </a:t>
+            </a:r>
+            <a:r>
+              <a:rPr lang="de-DE" sz="1600" b="1" dirty="0" err="1">
+                <a:latin typeface="Courier New" panose="02070309020205020404" pitchFamily="49" charset="0"/>
+                <a:cs typeface="Courier New" panose="02070309020205020404" pitchFamily="49" charset="0"/>
+              </a:rPr>
+              <a:t>Proxmox</a:t>
+            </a:r>
+            <a:r>
+              <a:rPr lang="de-DE" sz="1600" b="1" dirty="0">
+                <a:latin typeface="Courier New" panose="02070309020205020404" pitchFamily="49" charset="0"/>
+                <a:cs typeface="Courier New" panose="02070309020205020404" pitchFamily="49" charset="0"/>
+              </a:rPr>
+              <a:t> Home</a:t>
+            </a:r>
+          </a:p>
+          <a:p>
+            <a:r>
+              <a:rPr lang="de-DE" sz="1600" b="1" dirty="0">
+                <a:latin typeface="Courier New" panose="02070309020205020404" pitchFamily="49" charset="0"/>
+                <a:cs typeface="Courier New" panose="02070309020205020404" pitchFamily="49" charset="0"/>
+              </a:rPr>
+              <a:t>      WATCHTOWER_NOTIFICATION_EMAIL_SERVER_USER: mywatchtower@rothnet.org</a:t>
+            </a:r>
+          </a:p>
+          <a:p>
+            <a:r>
+              <a:rPr lang="de-DE" sz="1600" b="1" dirty="0">
+                <a:latin typeface="Courier New" panose="02070309020205020404" pitchFamily="49" charset="0"/>
+                <a:cs typeface="Courier New" panose="02070309020205020404" pitchFamily="49" charset="0"/>
+              </a:rPr>
+              <a:t>      WATCHTOWER_NOTIFICATION_EMAIL_SERVER_PASSWORD: Obxxxxx465789+!</a:t>
+            </a:r>
+          </a:p>
+          <a:p>
+            <a:r>
+              <a:rPr lang="de-DE" sz="1600" b="1" dirty="0">
+                <a:latin typeface="Courier New" panose="02070309020205020404" pitchFamily="49" charset="0"/>
+                <a:cs typeface="Courier New" panose="02070309020205020404" pitchFamily="49" charset="0"/>
+              </a:rPr>
+              <a:t>      WATCHTOWER_NOTIFICATION_EMAIL_DELAY: 2</a:t>
+            </a:r>
+          </a:p>
+          <a:p>
+            <a:r>
+              <a:rPr lang="de-DE" sz="1600" b="1" dirty="0">
+                <a:latin typeface="Courier New" panose="02070309020205020404" pitchFamily="49" charset="0"/>
+                <a:cs typeface="Courier New" panose="02070309020205020404" pitchFamily="49" charset="0"/>
+              </a:rPr>
+              <a:t>    </a:t>
+            </a:r>
+            <a:r>
+              <a:rPr lang="de-DE" sz="1600" b="1" dirty="0" err="1">
+                <a:latin typeface="Courier New" panose="02070309020205020404" pitchFamily="49" charset="0"/>
+                <a:cs typeface="Courier New" panose="02070309020205020404" pitchFamily="49" charset="0"/>
+              </a:rPr>
+              <a:t>volumes</a:t>
+            </a:r>
+            <a:r>
+              <a:rPr lang="de-DE" sz="1600" b="1" dirty="0">
+                <a:latin typeface="Courier New" panose="02070309020205020404" pitchFamily="49" charset="0"/>
+                <a:cs typeface="Courier New" panose="02070309020205020404" pitchFamily="49" charset="0"/>
+              </a:rPr>
+              <a:t>:</a:t>
+            </a:r>
+          </a:p>
+          <a:p>
+            <a:r>
+              <a:rPr lang="de-DE" sz="1600" b="1" dirty="0">
+                <a:latin typeface="Courier New" panose="02070309020205020404" pitchFamily="49" charset="0"/>
+                <a:cs typeface="Courier New" panose="02070309020205020404" pitchFamily="49" charset="0"/>
+              </a:rPr>
+              <a:t>      - /</a:t>
+            </a:r>
+            <a:r>
+              <a:rPr lang="de-DE" sz="1600" b="1" dirty="0" err="1">
+                <a:latin typeface="Courier New" panose="02070309020205020404" pitchFamily="49" charset="0"/>
+                <a:cs typeface="Courier New" panose="02070309020205020404" pitchFamily="49" charset="0"/>
+              </a:rPr>
+              <a:t>var</a:t>
+            </a:r>
+            <a:r>
+              <a:rPr lang="de-DE" sz="1600" b="1" dirty="0">
+                <a:latin typeface="Courier New" panose="02070309020205020404" pitchFamily="49" charset="0"/>
+                <a:cs typeface="Courier New" panose="02070309020205020404" pitchFamily="49" charset="0"/>
+              </a:rPr>
+              <a:t>/</a:t>
+            </a:r>
+            <a:r>
+              <a:rPr lang="de-DE" sz="1600" b="1" dirty="0" err="1">
+                <a:latin typeface="Courier New" panose="02070309020205020404" pitchFamily="49" charset="0"/>
+                <a:cs typeface="Courier New" panose="02070309020205020404" pitchFamily="49" charset="0"/>
+              </a:rPr>
+              <a:t>run</a:t>
+            </a:r>
+            <a:r>
+              <a:rPr lang="de-DE" sz="1600" b="1" dirty="0">
+                <a:latin typeface="Courier New" panose="02070309020205020404" pitchFamily="49" charset="0"/>
+                <a:cs typeface="Courier New" panose="02070309020205020404" pitchFamily="49" charset="0"/>
+              </a:rPr>
+              <a:t>/</a:t>
+            </a:r>
+            <a:r>
+              <a:rPr lang="de-DE" sz="1600" b="1" dirty="0" err="1">
+                <a:latin typeface="Courier New" panose="02070309020205020404" pitchFamily="49" charset="0"/>
+                <a:cs typeface="Courier New" panose="02070309020205020404" pitchFamily="49" charset="0"/>
+              </a:rPr>
+              <a:t>docker.sock</a:t>
+            </a:r>
+            <a:r>
+              <a:rPr lang="de-DE" sz="1600" b="1" dirty="0">
+                <a:latin typeface="Courier New" panose="02070309020205020404" pitchFamily="49" charset="0"/>
+                <a:cs typeface="Courier New" panose="02070309020205020404" pitchFamily="49" charset="0"/>
+              </a:rPr>
+              <a:t>:/</a:t>
+            </a:r>
+            <a:r>
+              <a:rPr lang="de-DE" sz="1600" b="1" dirty="0" err="1">
+                <a:latin typeface="Courier New" panose="02070309020205020404" pitchFamily="49" charset="0"/>
+                <a:cs typeface="Courier New" panose="02070309020205020404" pitchFamily="49" charset="0"/>
+              </a:rPr>
+              <a:t>var</a:t>
+            </a:r>
+            <a:r>
+              <a:rPr lang="de-DE" sz="1600" b="1" dirty="0">
+                <a:latin typeface="Courier New" panose="02070309020205020404" pitchFamily="49" charset="0"/>
+                <a:cs typeface="Courier New" panose="02070309020205020404" pitchFamily="49" charset="0"/>
+              </a:rPr>
+              <a:t>/</a:t>
+            </a:r>
+            <a:r>
+              <a:rPr lang="de-DE" sz="1600" b="1" dirty="0" err="1">
+                <a:latin typeface="Courier New" panose="02070309020205020404" pitchFamily="49" charset="0"/>
+                <a:cs typeface="Courier New" panose="02070309020205020404" pitchFamily="49" charset="0"/>
+              </a:rPr>
+              <a:t>run</a:t>
+            </a:r>
+            <a:r>
+              <a:rPr lang="de-DE" sz="1600" b="1" dirty="0">
+                <a:latin typeface="Courier New" panose="02070309020205020404" pitchFamily="49" charset="0"/>
+                <a:cs typeface="Courier New" panose="02070309020205020404" pitchFamily="49" charset="0"/>
+              </a:rPr>
+              <a:t>/</a:t>
+            </a:r>
+            <a:r>
+              <a:rPr lang="de-DE" sz="1600" b="1" dirty="0" err="1">
+                <a:latin typeface="Courier New" panose="02070309020205020404" pitchFamily="49" charset="0"/>
+                <a:cs typeface="Courier New" panose="02070309020205020404" pitchFamily="49" charset="0"/>
+              </a:rPr>
+              <a:t>docker.sock</a:t>
+            </a:r>
+            <a:endParaRPr lang="de-DE" sz="1600" b="1" dirty="0">
+              <a:latin typeface="Courier New" panose="02070309020205020404" pitchFamily="49" charset="0"/>
+              <a:cs typeface="Courier New" panose="02070309020205020404" pitchFamily="49" charset="0"/>
+            </a:endParaRPr>
+          </a:p>
+          <a:p>
+            <a:r>
+              <a:rPr lang="de-DE" sz="1600" b="1" dirty="0">
+                <a:latin typeface="Courier New" panose="02070309020205020404" pitchFamily="49" charset="0"/>
+                <a:cs typeface="Courier New" panose="02070309020205020404" pitchFamily="49" charset="0"/>
+              </a:rPr>
+              <a:t>    </a:t>
+            </a:r>
+            <a:r>
+              <a:rPr lang="de-DE" sz="1600" b="1" dirty="0" err="1">
+                <a:latin typeface="Courier New" panose="02070309020205020404" pitchFamily="49" charset="0"/>
+                <a:cs typeface="Courier New" panose="02070309020205020404" pitchFamily="49" charset="0"/>
+              </a:rPr>
+              <a:t>command</a:t>
+            </a:r>
+            <a:r>
+              <a:rPr lang="de-DE" sz="1600" b="1" dirty="0">
+                <a:latin typeface="Courier New" panose="02070309020205020404" pitchFamily="49" charset="0"/>
+                <a:cs typeface="Courier New" panose="02070309020205020404" pitchFamily="49" charset="0"/>
+              </a:rPr>
+              <a:t>: --</a:t>
+            </a:r>
+            <a:r>
+              <a:rPr lang="de-DE" sz="1600" b="1" dirty="0" err="1">
+                <a:latin typeface="Courier New" panose="02070309020205020404" pitchFamily="49" charset="0"/>
+                <a:cs typeface="Courier New" panose="02070309020205020404" pitchFamily="49" charset="0"/>
+              </a:rPr>
+              <a:t>cleanup</a:t>
+            </a:r>
+            <a:r>
+              <a:rPr lang="de-DE" sz="1600" b="1" dirty="0">
+                <a:latin typeface="Courier New" panose="02070309020205020404" pitchFamily="49" charset="0"/>
+                <a:cs typeface="Courier New" panose="02070309020205020404" pitchFamily="49" charset="0"/>
+              </a:rPr>
+              <a:t> --</a:t>
+            </a:r>
+            <a:r>
+              <a:rPr lang="de-DE" sz="1600" b="1" dirty="0" err="1">
+                <a:latin typeface="Courier New" panose="02070309020205020404" pitchFamily="49" charset="0"/>
+                <a:cs typeface="Courier New" panose="02070309020205020404" pitchFamily="49" charset="0"/>
+              </a:rPr>
+              <a:t>interval</a:t>
+            </a:r>
+            <a:r>
+              <a:rPr lang="de-DE" sz="1600" b="1" dirty="0">
+                <a:latin typeface="Courier New" panose="02070309020205020404" pitchFamily="49" charset="0"/>
+                <a:cs typeface="Courier New" panose="02070309020205020404" pitchFamily="49" charset="0"/>
+              </a:rPr>
+              <a:t> 86400</a:t>
+            </a:r>
+          </a:p>
+        </p:txBody>
+      </p:sp>
+    </p:spTree>
+    <p:extLst>
+      <p:ext uri="{BB962C8B-B14F-4D97-AF65-F5344CB8AC3E}">
+        <p14:creationId xmlns:p14="http://schemas.microsoft.com/office/powerpoint/2010/main" val="2730254631"/>
+      </p:ext>
+    </p:extLst>
+  </p:cSld>
+  <p:clrMapOvr>
+    <a:masterClrMapping/>
+  </p:clrMapOvr>
+</p:sld>
+</file>
+
+<file path=ppt/slides/slide39.xml><?xml version="1.0" encoding="utf-8"?>
 <p:sld xmlns:a="http://schemas.openxmlformats.org/drawingml/2006/main" xmlns:r="http://schemas.openxmlformats.org/officeDocument/2006/relationships" xmlns:p="http://schemas.openxmlformats.org/presentationml/2006/main">
   <p:cSld>
     <p:spTree>
@@ -21285,479 +21879,6 @@
 </p:sld>
 </file>
 
-<file path=ppt/slides/slide39.xml><?xml version="1.0" encoding="utf-8"?>
-<p:sld xmlns:a="http://schemas.openxmlformats.org/drawingml/2006/main" xmlns:r="http://schemas.openxmlformats.org/officeDocument/2006/relationships" xmlns:p="http://schemas.openxmlformats.org/presentationml/2006/main">
-  <p:cSld>
-    <p:spTree>
-      <p:nvGrpSpPr>
-        <p:cNvPr id="1" name=""/>
-        <p:cNvGrpSpPr/>
-        <p:nvPr/>
-      </p:nvGrpSpPr>
-      <p:grpSpPr>
-        <a:xfrm>
-          <a:off x="0" y="0"/>
-          <a:ext cx="0" cy="0"/>
-          <a:chOff x="0" y="0"/>
-          <a:chExt cx="0" cy="0"/>
-        </a:xfrm>
-      </p:grpSpPr>
-      <p:sp>
-        <p:nvSpPr>
-          <p:cNvPr id="2" name="Titel 1">
-            <a:extLst>
-              <a:ext uri="{FF2B5EF4-FFF2-40B4-BE49-F238E27FC236}">
-                <a16:creationId xmlns:a16="http://schemas.microsoft.com/office/drawing/2014/main" id="{62C9C1D8-1D7A-7867-97E6-D5F4084883C4}"/>
-              </a:ext>
-            </a:extLst>
-          </p:cNvPr>
-          <p:cNvSpPr>
-            <a:spLocks noGrp="1"/>
-          </p:cNvSpPr>
-          <p:nvPr>
-            <p:ph type="title"/>
-          </p:nvPr>
-        </p:nvSpPr>
-        <p:spPr/>
-        <p:txBody>
-          <a:bodyPr/>
-          <a:lstStyle/>
-          <a:p>
-            <a:r>
-              <a:rPr lang="de-DE" dirty="0"/>
-              <a:t>Zusammenfassung: Erstellung von….</a:t>
-            </a:r>
-          </a:p>
-        </p:txBody>
-      </p:sp>
-      <p:sp>
-        <p:nvSpPr>
-          <p:cNvPr id="3" name="Inhaltsplatzhalter 2">
-            <a:extLst>
-              <a:ext uri="{FF2B5EF4-FFF2-40B4-BE49-F238E27FC236}">
-                <a16:creationId xmlns:a16="http://schemas.microsoft.com/office/drawing/2014/main" id="{B4AA6E59-5546-1D59-E68E-8F36790575C4}"/>
-              </a:ext>
-            </a:extLst>
-          </p:cNvPr>
-          <p:cNvSpPr>
-            <a:spLocks noGrp="1"/>
-          </p:cNvSpPr>
-          <p:nvPr>
-            <p:ph idx="1"/>
-          </p:nvPr>
-        </p:nvSpPr>
-        <p:spPr/>
-        <p:txBody>
-          <a:bodyPr/>
-          <a:lstStyle/>
-          <a:p>
-            <a:r>
-              <a:rPr lang="de-DE" dirty="0"/>
-              <a:t>…Container-Applikation: mit </a:t>
-            </a:r>
-            <a:r>
-              <a:rPr lang="de-DE" sz="2400" b="1" dirty="0" err="1">
-                <a:highlight>
-                  <a:srgbClr val="C0C0C0"/>
-                </a:highlight>
-                <a:latin typeface="Courier New" panose="02070309020205020404" pitchFamily="49" charset="0"/>
-                <a:cs typeface="Courier New" panose="02070309020205020404" pitchFamily="49" charset="0"/>
-              </a:rPr>
-              <a:t>docker</a:t>
-            </a:r>
-            <a:r>
-              <a:rPr lang="de-DE" sz="2400" b="1" dirty="0">
-                <a:highlight>
-                  <a:srgbClr val="C0C0C0"/>
-                </a:highlight>
-                <a:latin typeface="Courier New" panose="02070309020205020404" pitchFamily="49" charset="0"/>
-                <a:cs typeface="Courier New" panose="02070309020205020404" pitchFamily="49" charset="0"/>
-              </a:rPr>
-              <a:t> </a:t>
-            </a:r>
-            <a:r>
-              <a:rPr lang="de-DE" sz="2400" b="1" dirty="0" err="1">
-                <a:highlight>
-                  <a:srgbClr val="C0C0C0"/>
-                </a:highlight>
-                <a:latin typeface="Courier New" panose="02070309020205020404" pitchFamily="49" charset="0"/>
-                <a:cs typeface="Courier New" panose="02070309020205020404" pitchFamily="49" charset="0"/>
-              </a:rPr>
-              <a:t>run</a:t>
-            </a:r>
-            <a:r>
-              <a:rPr lang="de-DE" sz="2400" b="1" dirty="0">
-                <a:highlight>
-                  <a:srgbClr val="C0C0C0"/>
-                </a:highlight>
-                <a:latin typeface="Courier New" panose="02070309020205020404" pitchFamily="49" charset="0"/>
-                <a:cs typeface="Courier New" panose="02070309020205020404" pitchFamily="49" charset="0"/>
-              </a:rPr>
-              <a:t> &lt;image-name&gt;</a:t>
-            </a:r>
-          </a:p>
-          <a:p>
-            <a:r>
-              <a:rPr lang="de-DE" dirty="0"/>
-              <a:t>…Einzel/Multi-Container-Applikation: mit </a:t>
-            </a:r>
-            <a:r>
-              <a:rPr lang="de-DE" sz="2400" b="1" i="1" dirty="0" err="1">
-                <a:highlight>
-                  <a:srgbClr val="C0C0C0"/>
-                </a:highlight>
-                <a:latin typeface="Courier New" panose="02070309020205020404" pitchFamily="49" charset="0"/>
-                <a:cs typeface="Courier New" panose="02070309020205020404" pitchFamily="49" charset="0"/>
-              </a:rPr>
-              <a:t>docker</a:t>
-            </a:r>
-            <a:r>
-              <a:rPr lang="de-DE" sz="2400" b="1" i="1" dirty="0">
-                <a:highlight>
-                  <a:srgbClr val="C0C0C0"/>
-                </a:highlight>
-                <a:latin typeface="Courier New" panose="02070309020205020404" pitchFamily="49" charset="0"/>
-                <a:cs typeface="Courier New" panose="02070309020205020404" pitchFamily="49" charset="0"/>
-              </a:rPr>
-              <a:t> </a:t>
-            </a:r>
-            <a:r>
-              <a:rPr lang="de-DE" sz="2400" b="1" i="1" dirty="0" err="1">
-                <a:highlight>
-                  <a:srgbClr val="C0C0C0"/>
-                </a:highlight>
-                <a:latin typeface="Courier New" panose="02070309020205020404" pitchFamily="49" charset="0"/>
-                <a:cs typeface="Courier New" panose="02070309020205020404" pitchFamily="49" charset="0"/>
-              </a:rPr>
-              <a:t>compose</a:t>
-            </a:r>
-            <a:r>
-              <a:rPr lang="de-DE" sz="2400" b="1" dirty="0">
-                <a:highlight>
-                  <a:srgbClr val="C0C0C0"/>
-                </a:highlight>
-                <a:latin typeface="Courier New" panose="02070309020205020404" pitchFamily="49" charset="0"/>
-                <a:cs typeface="Courier New" panose="02070309020205020404" pitchFamily="49" charset="0"/>
-              </a:rPr>
-              <a:t> </a:t>
-            </a:r>
-            <a:r>
-              <a:rPr lang="de-DE" sz="2400" b="1" dirty="0" err="1">
-                <a:highlight>
-                  <a:srgbClr val="C0C0C0"/>
-                </a:highlight>
-                <a:latin typeface="Courier New" panose="02070309020205020404" pitchFamily="49" charset="0"/>
-                <a:cs typeface="Courier New" panose="02070309020205020404" pitchFamily="49" charset="0"/>
-              </a:rPr>
-              <a:t>up</a:t>
-            </a:r>
-            <a:r>
-              <a:rPr lang="de-DE" dirty="0"/>
-              <a:t> und einer </a:t>
-            </a:r>
-            <a:r>
-              <a:rPr lang="de-DE" b="1" dirty="0" err="1"/>
-              <a:t>docker-compose.yml</a:t>
-            </a:r>
-            <a:r>
-              <a:rPr lang="de-DE" b="1" dirty="0"/>
-              <a:t> </a:t>
-            </a:r>
-            <a:r>
-              <a:rPr lang="de-DE" dirty="0"/>
-              <a:t>- Datei</a:t>
-            </a:r>
-          </a:p>
-          <a:p>
-            <a:r>
-              <a:rPr lang="de-DE" dirty="0"/>
-              <a:t>…</a:t>
-            </a:r>
-            <a:r>
-              <a:rPr lang="de-DE" dirty="0" err="1"/>
-              <a:t>Volumes</a:t>
-            </a:r>
-            <a:r>
-              <a:rPr lang="de-DE" dirty="0"/>
-              <a:t> :</a:t>
-            </a:r>
-          </a:p>
-          <a:p>
-            <a:pPr lvl="1"/>
-            <a:r>
-              <a:rPr lang="de-DE" dirty="0"/>
-              <a:t>Beim Erzeugen des Containers mit </a:t>
-            </a:r>
-            <a:r>
-              <a:rPr lang="de-DE" sz="2000" b="1" dirty="0" err="1">
-                <a:highlight>
-                  <a:srgbClr val="C0C0C0"/>
-                </a:highlight>
-                <a:latin typeface="Courier New" panose="02070309020205020404" pitchFamily="49" charset="0"/>
-                <a:cs typeface="Courier New" panose="02070309020205020404" pitchFamily="49" charset="0"/>
-              </a:rPr>
-              <a:t>docker</a:t>
-            </a:r>
-            <a:r>
-              <a:rPr lang="de-DE" sz="2000" b="1" dirty="0">
-                <a:highlight>
-                  <a:srgbClr val="C0C0C0"/>
-                </a:highlight>
-                <a:latin typeface="Courier New" panose="02070309020205020404" pitchFamily="49" charset="0"/>
-                <a:cs typeface="Courier New" panose="02070309020205020404" pitchFamily="49" charset="0"/>
-              </a:rPr>
-              <a:t> </a:t>
-            </a:r>
-            <a:r>
-              <a:rPr lang="de-DE" sz="2000" b="1" dirty="0" err="1">
-                <a:highlight>
-                  <a:srgbClr val="C0C0C0"/>
-                </a:highlight>
-                <a:latin typeface="Courier New" panose="02070309020205020404" pitchFamily="49" charset="0"/>
-                <a:cs typeface="Courier New" panose="02070309020205020404" pitchFamily="49" charset="0"/>
-              </a:rPr>
-              <a:t>run</a:t>
-            </a:r>
-            <a:r>
-              <a:rPr lang="de-DE" sz="2000" b="1" dirty="0">
-                <a:highlight>
-                  <a:srgbClr val="C0C0C0"/>
-                </a:highlight>
-                <a:latin typeface="Courier New" panose="02070309020205020404" pitchFamily="49" charset="0"/>
-                <a:cs typeface="Courier New" panose="02070309020205020404" pitchFamily="49" charset="0"/>
-              </a:rPr>
-              <a:t> </a:t>
-            </a:r>
-            <a:r>
-              <a:rPr lang="de-DE" dirty="0"/>
-              <a:t>und der Option </a:t>
-            </a:r>
-            <a:r>
-              <a:rPr lang="de-DE" sz="2000" b="1" dirty="0">
-                <a:highlight>
-                  <a:srgbClr val="C0C0C0"/>
-                </a:highlight>
-                <a:latin typeface="Courier New" panose="02070309020205020404" pitchFamily="49" charset="0"/>
-                <a:cs typeface="Courier New" panose="02070309020205020404" pitchFamily="49" charset="0"/>
-              </a:rPr>
-              <a:t>–v</a:t>
-            </a:r>
-          </a:p>
-          <a:p>
-            <a:pPr lvl="1"/>
-            <a:r>
-              <a:rPr lang="de-DE" dirty="0"/>
-              <a:t>In einer .</a:t>
-            </a:r>
-            <a:r>
-              <a:rPr lang="de-DE" dirty="0" err="1"/>
-              <a:t>yml</a:t>
-            </a:r>
-            <a:r>
-              <a:rPr lang="de-DE" dirty="0"/>
-              <a:t>-Datei vordefinieren und mit </a:t>
-            </a:r>
-            <a:r>
-              <a:rPr lang="de-DE" sz="2000" b="1" dirty="0" err="1">
-                <a:highlight>
-                  <a:srgbClr val="C0C0C0"/>
-                </a:highlight>
-                <a:latin typeface="Courier New" panose="02070309020205020404" pitchFamily="49" charset="0"/>
-                <a:cs typeface="Courier New" panose="02070309020205020404" pitchFamily="49" charset="0"/>
-              </a:rPr>
-              <a:t>docker</a:t>
-            </a:r>
-            <a:r>
-              <a:rPr lang="de-DE" sz="2000" b="1" dirty="0">
-                <a:highlight>
-                  <a:srgbClr val="C0C0C0"/>
-                </a:highlight>
-                <a:latin typeface="Courier New" panose="02070309020205020404" pitchFamily="49" charset="0"/>
-                <a:cs typeface="Courier New" panose="02070309020205020404" pitchFamily="49" charset="0"/>
-              </a:rPr>
-              <a:t> </a:t>
-            </a:r>
-            <a:r>
-              <a:rPr lang="de-DE" sz="2000" b="1" dirty="0" err="1">
-                <a:highlight>
-                  <a:srgbClr val="C0C0C0"/>
-                </a:highlight>
-                <a:latin typeface="Courier New" panose="02070309020205020404" pitchFamily="49" charset="0"/>
-                <a:cs typeface="Courier New" panose="02070309020205020404" pitchFamily="49" charset="0"/>
-              </a:rPr>
-              <a:t>compose</a:t>
-            </a:r>
-            <a:r>
-              <a:rPr lang="de-DE" sz="2000" b="1" dirty="0">
-                <a:highlight>
-                  <a:srgbClr val="C0C0C0"/>
-                </a:highlight>
-                <a:latin typeface="Courier New" panose="02070309020205020404" pitchFamily="49" charset="0"/>
-                <a:cs typeface="Courier New" panose="02070309020205020404" pitchFamily="49" charset="0"/>
-              </a:rPr>
-              <a:t> </a:t>
-            </a:r>
-            <a:r>
-              <a:rPr lang="de-DE" sz="2000" b="1" dirty="0" err="1">
-                <a:highlight>
-                  <a:srgbClr val="C0C0C0"/>
-                </a:highlight>
-                <a:latin typeface="Courier New" panose="02070309020205020404" pitchFamily="49" charset="0"/>
-                <a:cs typeface="Courier New" panose="02070309020205020404" pitchFamily="49" charset="0"/>
-              </a:rPr>
-              <a:t>up</a:t>
-            </a:r>
-            <a:r>
-              <a:rPr lang="de-DE" dirty="0"/>
-              <a:t> mit dem Container zusammen erzeugen</a:t>
-            </a:r>
-          </a:p>
-          <a:p>
-            <a:r>
-              <a:rPr lang="de-DE" dirty="0"/>
-              <a:t>…Image:</a:t>
-            </a:r>
-          </a:p>
-          <a:p>
-            <a:pPr lvl="1"/>
-            <a:r>
-              <a:rPr lang="de-DE" dirty="0"/>
-              <a:t>Aus einem Container: mit </a:t>
-            </a:r>
-            <a:r>
-              <a:rPr lang="de-DE" sz="2000" b="1" dirty="0" err="1">
-                <a:highlight>
-                  <a:srgbClr val="C0C0C0"/>
-                </a:highlight>
-                <a:latin typeface="Courier New" panose="02070309020205020404" pitchFamily="49" charset="0"/>
-                <a:cs typeface="Courier New" panose="02070309020205020404" pitchFamily="49" charset="0"/>
-              </a:rPr>
-              <a:t>docker</a:t>
-            </a:r>
-            <a:r>
-              <a:rPr lang="de-DE" sz="2000" b="1" dirty="0">
-                <a:highlight>
-                  <a:srgbClr val="C0C0C0"/>
-                </a:highlight>
-                <a:latin typeface="Courier New" panose="02070309020205020404" pitchFamily="49" charset="0"/>
-                <a:cs typeface="Courier New" panose="02070309020205020404" pitchFamily="49" charset="0"/>
-              </a:rPr>
-              <a:t> </a:t>
-            </a:r>
-            <a:r>
-              <a:rPr lang="de-DE" sz="2000" b="1" dirty="0" err="1">
-                <a:highlight>
-                  <a:srgbClr val="C0C0C0"/>
-                </a:highlight>
-                <a:latin typeface="Courier New" panose="02070309020205020404" pitchFamily="49" charset="0"/>
-                <a:cs typeface="Courier New" panose="02070309020205020404" pitchFamily="49" charset="0"/>
-              </a:rPr>
-              <a:t>commit</a:t>
-            </a:r>
-            <a:r>
-              <a:rPr lang="de-DE" sz="2000" b="1" dirty="0">
-                <a:highlight>
-                  <a:srgbClr val="C0C0C0"/>
-                </a:highlight>
-                <a:latin typeface="Courier New" panose="02070309020205020404" pitchFamily="49" charset="0"/>
-                <a:cs typeface="Courier New" panose="02070309020205020404" pitchFamily="49" charset="0"/>
-              </a:rPr>
-              <a:t> &lt;</a:t>
-            </a:r>
-            <a:r>
-              <a:rPr lang="de-DE" sz="2000" b="1" dirty="0" err="1">
-                <a:highlight>
-                  <a:srgbClr val="C0C0C0"/>
-                </a:highlight>
-                <a:latin typeface="Courier New" panose="02070309020205020404" pitchFamily="49" charset="0"/>
-                <a:cs typeface="Courier New" panose="02070309020205020404" pitchFamily="49" charset="0"/>
-              </a:rPr>
-              <a:t>container</a:t>
-            </a:r>
-            <a:r>
-              <a:rPr lang="de-DE" sz="2000" b="1" dirty="0">
-                <a:highlight>
-                  <a:srgbClr val="C0C0C0"/>
-                </a:highlight>
-                <a:latin typeface="Courier New" panose="02070309020205020404" pitchFamily="49" charset="0"/>
-                <a:cs typeface="Courier New" panose="02070309020205020404" pitchFamily="49" charset="0"/>
-              </a:rPr>
-              <a:t>&gt; &lt;image-name&gt;</a:t>
-            </a:r>
-          </a:p>
-          <a:p>
-            <a:pPr lvl="1"/>
-            <a:r>
-              <a:rPr lang="de-DE" dirty="0"/>
-              <a:t>Von Grund auf: mit einem </a:t>
-            </a:r>
-            <a:r>
-              <a:rPr lang="de-DE" sz="2000" b="1" dirty="0" err="1">
-                <a:highlight>
-                  <a:srgbClr val="C0C0C0"/>
-                </a:highlight>
-                <a:latin typeface="Courier New" panose="02070309020205020404" pitchFamily="49" charset="0"/>
-                <a:cs typeface="Courier New" panose="02070309020205020404" pitchFamily="49" charset="0"/>
-              </a:rPr>
-              <a:t>Dockerfile</a:t>
-            </a:r>
-            <a:r>
-              <a:rPr lang="de-DE" dirty="0"/>
-              <a:t> und </a:t>
-            </a:r>
-            <a:r>
-              <a:rPr lang="de-DE" sz="2000" b="1" dirty="0" err="1">
-                <a:highlight>
-                  <a:srgbClr val="C0C0C0"/>
-                </a:highlight>
-                <a:latin typeface="Courier New" panose="02070309020205020404" pitchFamily="49" charset="0"/>
-                <a:cs typeface="Courier New" panose="02070309020205020404" pitchFamily="49" charset="0"/>
-              </a:rPr>
-              <a:t>docker</a:t>
-            </a:r>
-            <a:r>
-              <a:rPr lang="de-DE" sz="2000" b="1" dirty="0">
-                <a:highlight>
-                  <a:srgbClr val="C0C0C0"/>
-                </a:highlight>
-                <a:latin typeface="Courier New" panose="02070309020205020404" pitchFamily="49" charset="0"/>
-                <a:cs typeface="Courier New" panose="02070309020205020404" pitchFamily="49" charset="0"/>
-              </a:rPr>
-              <a:t> </a:t>
-            </a:r>
-            <a:r>
-              <a:rPr lang="de-DE" sz="2000" b="1" dirty="0" err="1">
-                <a:highlight>
-                  <a:srgbClr val="C0C0C0"/>
-                </a:highlight>
-                <a:latin typeface="Courier New" panose="02070309020205020404" pitchFamily="49" charset="0"/>
-                <a:cs typeface="Courier New" panose="02070309020205020404" pitchFamily="49" charset="0"/>
-              </a:rPr>
-              <a:t>build</a:t>
-            </a:r>
-            <a:endParaRPr lang="de-DE" sz="2000" b="1" dirty="0">
-              <a:highlight>
-                <a:srgbClr val="C0C0C0"/>
-              </a:highlight>
-              <a:latin typeface="Courier New" panose="02070309020205020404" pitchFamily="49" charset="0"/>
-              <a:cs typeface="Courier New" panose="02070309020205020404" pitchFamily="49" charset="0"/>
-            </a:endParaRPr>
-          </a:p>
-        </p:txBody>
-      </p:sp>
-    </p:spTree>
-    <p:extLst>
-      <p:ext uri="{BB962C8B-B14F-4D97-AF65-F5344CB8AC3E}">
-        <p14:creationId xmlns:p14="http://schemas.microsoft.com/office/powerpoint/2010/main" val="267169117"/>
-      </p:ext>
-    </p:extLst>
-  </p:cSld>
-  <p:clrMapOvr>
-    <a:masterClrMapping/>
-  </p:clrMapOvr>
-</p:sld>
-</file>
-
 <file path=ppt/slides/slide4.xml><?xml version="1.0" encoding="utf-8"?>
 <p:sld xmlns:a="http://schemas.openxmlformats.org/drawingml/2006/main" xmlns:r="http://schemas.openxmlformats.org/officeDocument/2006/relationships" xmlns:p="http://schemas.openxmlformats.org/presentationml/2006/main">
   <p:cSld>
@@ -21914,6 +22035,479 @@
 </file>
 
 <file path=ppt/slides/slide40.xml><?xml version="1.0" encoding="utf-8"?>
+<p:sld xmlns:a="http://schemas.openxmlformats.org/drawingml/2006/main" xmlns:r="http://schemas.openxmlformats.org/officeDocument/2006/relationships" xmlns:p="http://schemas.openxmlformats.org/presentationml/2006/main">
+  <p:cSld>
+    <p:spTree>
+      <p:nvGrpSpPr>
+        <p:cNvPr id="1" name=""/>
+        <p:cNvGrpSpPr/>
+        <p:nvPr/>
+      </p:nvGrpSpPr>
+      <p:grpSpPr>
+        <a:xfrm>
+          <a:off x="0" y="0"/>
+          <a:ext cx="0" cy="0"/>
+          <a:chOff x="0" y="0"/>
+          <a:chExt cx="0" cy="0"/>
+        </a:xfrm>
+      </p:grpSpPr>
+      <p:sp>
+        <p:nvSpPr>
+          <p:cNvPr id="2" name="Titel 1">
+            <a:extLst>
+              <a:ext uri="{FF2B5EF4-FFF2-40B4-BE49-F238E27FC236}">
+                <a16:creationId xmlns:a16="http://schemas.microsoft.com/office/drawing/2014/main" id="{62C9C1D8-1D7A-7867-97E6-D5F4084883C4}"/>
+              </a:ext>
+            </a:extLst>
+          </p:cNvPr>
+          <p:cNvSpPr>
+            <a:spLocks noGrp="1"/>
+          </p:cNvSpPr>
+          <p:nvPr>
+            <p:ph type="title"/>
+          </p:nvPr>
+        </p:nvSpPr>
+        <p:spPr/>
+        <p:txBody>
+          <a:bodyPr/>
+          <a:lstStyle/>
+          <a:p>
+            <a:r>
+              <a:rPr lang="de-DE" dirty="0"/>
+              <a:t>Zusammenfassung: Erstellung von….</a:t>
+            </a:r>
+          </a:p>
+        </p:txBody>
+      </p:sp>
+      <p:sp>
+        <p:nvSpPr>
+          <p:cNvPr id="3" name="Inhaltsplatzhalter 2">
+            <a:extLst>
+              <a:ext uri="{FF2B5EF4-FFF2-40B4-BE49-F238E27FC236}">
+                <a16:creationId xmlns:a16="http://schemas.microsoft.com/office/drawing/2014/main" id="{B4AA6E59-5546-1D59-E68E-8F36790575C4}"/>
+              </a:ext>
+            </a:extLst>
+          </p:cNvPr>
+          <p:cNvSpPr>
+            <a:spLocks noGrp="1"/>
+          </p:cNvSpPr>
+          <p:nvPr>
+            <p:ph idx="1"/>
+          </p:nvPr>
+        </p:nvSpPr>
+        <p:spPr/>
+        <p:txBody>
+          <a:bodyPr/>
+          <a:lstStyle/>
+          <a:p>
+            <a:r>
+              <a:rPr lang="de-DE" dirty="0"/>
+              <a:t>…Container-Applikation: mit </a:t>
+            </a:r>
+            <a:r>
+              <a:rPr lang="de-DE" sz="2400" b="1" dirty="0" err="1">
+                <a:highlight>
+                  <a:srgbClr val="C0C0C0"/>
+                </a:highlight>
+                <a:latin typeface="Courier New" panose="02070309020205020404" pitchFamily="49" charset="0"/>
+                <a:cs typeface="Courier New" panose="02070309020205020404" pitchFamily="49" charset="0"/>
+              </a:rPr>
+              <a:t>docker</a:t>
+            </a:r>
+            <a:r>
+              <a:rPr lang="de-DE" sz="2400" b="1" dirty="0">
+                <a:highlight>
+                  <a:srgbClr val="C0C0C0"/>
+                </a:highlight>
+                <a:latin typeface="Courier New" panose="02070309020205020404" pitchFamily="49" charset="0"/>
+                <a:cs typeface="Courier New" panose="02070309020205020404" pitchFamily="49" charset="0"/>
+              </a:rPr>
+              <a:t> </a:t>
+            </a:r>
+            <a:r>
+              <a:rPr lang="de-DE" sz="2400" b="1" dirty="0" err="1">
+                <a:highlight>
+                  <a:srgbClr val="C0C0C0"/>
+                </a:highlight>
+                <a:latin typeface="Courier New" panose="02070309020205020404" pitchFamily="49" charset="0"/>
+                <a:cs typeface="Courier New" panose="02070309020205020404" pitchFamily="49" charset="0"/>
+              </a:rPr>
+              <a:t>run</a:t>
+            </a:r>
+            <a:r>
+              <a:rPr lang="de-DE" sz="2400" b="1" dirty="0">
+                <a:highlight>
+                  <a:srgbClr val="C0C0C0"/>
+                </a:highlight>
+                <a:latin typeface="Courier New" panose="02070309020205020404" pitchFamily="49" charset="0"/>
+                <a:cs typeface="Courier New" panose="02070309020205020404" pitchFamily="49" charset="0"/>
+              </a:rPr>
+              <a:t> &lt;image-name&gt;</a:t>
+            </a:r>
+          </a:p>
+          <a:p>
+            <a:r>
+              <a:rPr lang="de-DE" dirty="0"/>
+              <a:t>…Einzel/Multi-Container-Applikation: mit </a:t>
+            </a:r>
+            <a:r>
+              <a:rPr lang="de-DE" sz="2400" b="1" i="1" dirty="0" err="1">
+                <a:highlight>
+                  <a:srgbClr val="C0C0C0"/>
+                </a:highlight>
+                <a:latin typeface="Courier New" panose="02070309020205020404" pitchFamily="49" charset="0"/>
+                <a:cs typeface="Courier New" panose="02070309020205020404" pitchFamily="49" charset="0"/>
+              </a:rPr>
+              <a:t>docker</a:t>
+            </a:r>
+            <a:r>
+              <a:rPr lang="de-DE" sz="2400" b="1" i="1" dirty="0">
+                <a:highlight>
+                  <a:srgbClr val="C0C0C0"/>
+                </a:highlight>
+                <a:latin typeface="Courier New" panose="02070309020205020404" pitchFamily="49" charset="0"/>
+                <a:cs typeface="Courier New" panose="02070309020205020404" pitchFamily="49" charset="0"/>
+              </a:rPr>
+              <a:t> </a:t>
+            </a:r>
+            <a:r>
+              <a:rPr lang="de-DE" sz="2400" b="1" i="1" dirty="0" err="1">
+                <a:highlight>
+                  <a:srgbClr val="C0C0C0"/>
+                </a:highlight>
+                <a:latin typeface="Courier New" panose="02070309020205020404" pitchFamily="49" charset="0"/>
+                <a:cs typeface="Courier New" panose="02070309020205020404" pitchFamily="49" charset="0"/>
+              </a:rPr>
+              <a:t>compose</a:t>
+            </a:r>
+            <a:r>
+              <a:rPr lang="de-DE" sz="2400" b="1" dirty="0">
+                <a:highlight>
+                  <a:srgbClr val="C0C0C0"/>
+                </a:highlight>
+                <a:latin typeface="Courier New" panose="02070309020205020404" pitchFamily="49" charset="0"/>
+                <a:cs typeface="Courier New" panose="02070309020205020404" pitchFamily="49" charset="0"/>
+              </a:rPr>
+              <a:t> </a:t>
+            </a:r>
+            <a:r>
+              <a:rPr lang="de-DE" sz="2400" b="1" dirty="0" err="1">
+                <a:highlight>
+                  <a:srgbClr val="C0C0C0"/>
+                </a:highlight>
+                <a:latin typeface="Courier New" panose="02070309020205020404" pitchFamily="49" charset="0"/>
+                <a:cs typeface="Courier New" panose="02070309020205020404" pitchFamily="49" charset="0"/>
+              </a:rPr>
+              <a:t>up</a:t>
+            </a:r>
+            <a:r>
+              <a:rPr lang="de-DE" dirty="0"/>
+              <a:t> und einer </a:t>
+            </a:r>
+            <a:r>
+              <a:rPr lang="de-DE" b="1" dirty="0" err="1"/>
+              <a:t>docker-compose.yml</a:t>
+            </a:r>
+            <a:r>
+              <a:rPr lang="de-DE" b="1" dirty="0"/>
+              <a:t> </a:t>
+            </a:r>
+            <a:r>
+              <a:rPr lang="de-DE" dirty="0"/>
+              <a:t>- Datei</a:t>
+            </a:r>
+          </a:p>
+          <a:p>
+            <a:r>
+              <a:rPr lang="de-DE" dirty="0"/>
+              <a:t>…</a:t>
+            </a:r>
+            <a:r>
+              <a:rPr lang="de-DE" dirty="0" err="1"/>
+              <a:t>Volumes</a:t>
+            </a:r>
+            <a:r>
+              <a:rPr lang="de-DE" dirty="0"/>
+              <a:t> :</a:t>
+            </a:r>
+          </a:p>
+          <a:p>
+            <a:pPr lvl="1"/>
+            <a:r>
+              <a:rPr lang="de-DE" dirty="0"/>
+              <a:t>Beim Erzeugen des Containers mit </a:t>
+            </a:r>
+            <a:r>
+              <a:rPr lang="de-DE" sz="2000" b="1" dirty="0" err="1">
+                <a:highlight>
+                  <a:srgbClr val="C0C0C0"/>
+                </a:highlight>
+                <a:latin typeface="Courier New" panose="02070309020205020404" pitchFamily="49" charset="0"/>
+                <a:cs typeface="Courier New" panose="02070309020205020404" pitchFamily="49" charset="0"/>
+              </a:rPr>
+              <a:t>docker</a:t>
+            </a:r>
+            <a:r>
+              <a:rPr lang="de-DE" sz="2000" b="1" dirty="0">
+                <a:highlight>
+                  <a:srgbClr val="C0C0C0"/>
+                </a:highlight>
+                <a:latin typeface="Courier New" panose="02070309020205020404" pitchFamily="49" charset="0"/>
+                <a:cs typeface="Courier New" panose="02070309020205020404" pitchFamily="49" charset="0"/>
+              </a:rPr>
+              <a:t> </a:t>
+            </a:r>
+            <a:r>
+              <a:rPr lang="de-DE" sz="2000" b="1" dirty="0" err="1">
+                <a:highlight>
+                  <a:srgbClr val="C0C0C0"/>
+                </a:highlight>
+                <a:latin typeface="Courier New" panose="02070309020205020404" pitchFamily="49" charset="0"/>
+                <a:cs typeface="Courier New" panose="02070309020205020404" pitchFamily="49" charset="0"/>
+              </a:rPr>
+              <a:t>run</a:t>
+            </a:r>
+            <a:r>
+              <a:rPr lang="de-DE" sz="2000" b="1" dirty="0">
+                <a:highlight>
+                  <a:srgbClr val="C0C0C0"/>
+                </a:highlight>
+                <a:latin typeface="Courier New" panose="02070309020205020404" pitchFamily="49" charset="0"/>
+                <a:cs typeface="Courier New" panose="02070309020205020404" pitchFamily="49" charset="0"/>
+              </a:rPr>
+              <a:t> </a:t>
+            </a:r>
+            <a:r>
+              <a:rPr lang="de-DE" dirty="0"/>
+              <a:t>und der Option </a:t>
+            </a:r>
+            <a:r>
+              <a:rPr lang="de-DE" sz="2000" b="1" dirty="0">
+                <a:highlight>
+                  <a:srgbClr val="C0C0C0"/>
+                </a:highlight>
+                <a:latin typeface="Courier New" panose="02070309020205020404" pitchFamily="49" charset="0"/>
+                <a:cs typeface="Courier New" panose="02070309020205020404" pitchFamily="49" charset="0"/>
+              </a:rPr>
+              <a:t>–v</a:t>
+            </a:r>
+          </a:p>
+          <a:p>
+            <a:pPr lvl="1"/>
+            <a:r>
+              <a:rPr lang="de-DE" dirty="0"/>
+              <a:t>In einer .</a:t>
+            </a:r>
+            <a:r>
+              <a:rPr lang="de-DE" dirty="0" err="1"/>
+              <a:t>yml</a:t>
+            </a:r>
+            <a:r>
+              <a:rPr lang="de-DE" dirty="0"/>
+              <a:t>-Datei vordefinieren und mit </a:t>
+            </a:r>
+            <a:r>
+              <a:rPr lang="de-DE" sz="2000" b="1" dirty="0" err="1">
+                <a:highlight>
+                  <a:srgbClr val="C0C0C0"/>
+                </a:highlight>
+                <a:latin typeface="Courier New" panose="02070309020205020404" pitchFamily="49" charset="0"/>
+                <a:cs typeface="Courier New" panose="02070309020205020404" pitchFamily="49" charset="0"/>
+              </a:rPr>
+              <a:t>docker</a:t>
+            </a:r>
+            <a:r>
+              <a:rPr lang="de-DE" sz="2000" b="1" dirty="0">
+                <a:highlight>
+                  <a:srgbClr val="C0C0C0"/>
+                </a:highlight>
+                <a:latin typeface="Courier New" panose="02070309020205020404" pitchFamily="49" charset="0"/>
+                <a:cs typeface="Courier New" panose="02070309020205020404" pitchFamily="49" charset="0"/>
+              </a:rPr>
+              <a:t> </a:t>
+            </a:r>
+            <a:r>
+              <a:rPr lang="de-DE" sz="2000" b="1" dirty="0" err="1">
+                <a:highlight>
+                  <a:srgbClr val="C0C0C0"/>
+                </a:highlight>
+                <a:latin typeface="Courier New" panose="02070309020205020404" pitchFamily="49" charset="0"/>
+                <a:cs typeface="Courier New" panose="02070309020205020404" pitchFamily="49" charset="0"/>
+              </a:rPr>
+              <a:t>compose</a:t>
+            </a:r>
+            <a:r>
+              <a:rPr lang="de-DE" sz="2000" b="1" dirty="0">
+                <a:highlight>
+                  <a:srgbClr val="C0C0C0"/>
+                </a:highlight>
+                <a:latin typeface="Courier New" panose="02070309020205020404" pitchFamily="49" charset="0"/>
+                <a:cs typeface="Courier New" panose="02070309020205020404" pitchFamily="49" charset="0"/>
+              </a:rPr>
+              <a:t> </a:t>
+            </a:r>
+            <a:r>
+              <a:rPr lang="de-DE" sz="2000" b="1" dirty="0" err="1">
+                <a:highlight>
+                  <a:srgbClr val="C0C0C0"/>
+                </a:highlight>
+                <a:latin typeface="Courier New" panose="02070309020205020404" pitchFamily="49" charset="0"/>
+                <a:cs typeface="Courier New" panose="02070309020205020404" pitchFamily="49" charset="0"/>
+              </a:rPr>
+              <a:t>up</a:t>
+            </a:r>
+            <a:r>
+              <a:rPr lang="de-DE" dirty="0"/>
+              <a:t> mit dem Container zusammen erzeugen</a:t>
+            </a:r>
+          </a:p>
+          <a:p>
+            <a:r>
+              <a:rPr lang="de-DE" dirty="0"/>
+              <a:t>…Image:</a:t>
+            </a:r>
+          </a:p>
+          <a:p>
+            <a:pPr lvl="1"/>
+            <a:r>
+              <a:rPr lang="de-DE" dirty="0"/>
+              <a:t>Aus einem Container: mit </a:t>
+            </a:r>
+            <a:r>
+              <a:rPr lang="de-DE" sz="2000" b="1" dirty="0" err="1">
+                <a:highlight>
+                  <a:srgbClr val="C0C0C0"/>
+                </a:highlight>
+                <a:latin typeface="Courier New" panose="02070309020205020404" pitchFamily="49" charset="0"/>
+                <a:cs typeface="Courier New" panose="02070309020205020404" pitchFamily="49" charset="0"/>
+              </a:rPr>
+              <a:t>docker</a:t>
+            </a:r>
+            <a:r>
+              <a:rPr lang="de-DE" sz="2000" b="1" dirty="0">
+                <a:highlight>
+                  <a:srgbClr val="C0C0C0"/>
+                </a:highlight>
+                <a:latin typeface="Courier New" panose="02070309020205020404" pitchFamily="49" charset="0"/>
+                <a:cs typeface="Courier New" panose="02070309020205020404" pitchFamily="49" charset="0"/>
+              </a:rPr>
+              <a:t> </a:t>
+            </a:r>
+            <a:r>
+              <a:rPr lang="de-DE" sz="2000" b="1" dirty="0" err="1">
+                <a:highlight>
+                  <a:srgbClr val="C0C0C0"/>
+                </a:highlight>
+                <a:latin typeface="Courier New" panose="02070309020205020404" pitchFamily="49" charset="0"/>
+                <a:cs typeface="Courier New" panose="02070309020205020404" pitchFamily="49" charset="0"/>
+              </a:rPr>
+              <a:t>commit</a:t>
+            </a:r>
+            <a:r>
+              <a:rPr lang="de-DE" sz="2000" b="1" dirty="0">
+                <a:highlight>
+                  <a:srgbClr val="C0C0C0"/>
+                </a:highlight>
+                <a:latin typeface="Courier New" panose="02070309020205020404" pitchFamily="49" charset="0"/>
+                <a:cs typeface="Courier New" panose="02070309020205020404" pitchFamily="49" charset="0"/>
+              </a:rPr>
+              <a:t> &lt;</a:t>
+            </a:r>
+            <a:r>
+              <a:rPr lang="de-DE" sz="2000" b="1" dirty="0" err="1">
+                <a:highlight>
+                  <a:srgbClr val="C0C0C0"/>
+                </a:highlight>
+                <a:latin typeface="Courier New" panose="02070309020205020404" pitchFamily="49" charset="0"/>
+                <a:cs typeface="Courier New" panose="02070309020205020404" pitchFamily="49" charset="0"/>
+              </a:rPr>
+              <a:t>container</a:t>
+            </a:r>
+            <a:r>
+              <a:rPr lang="de-DE" sz="2000" b="1" dirty="0">
+                <a:highlight>
+                  <a:srgbClr val="C0C0C0"/>
+                </a:highlight>
+                <a:latin typeface="Courier New" panose="02070309020205020404" pitchFamily="49" charset="0"/>
+                <a:cs typeface="Courier New" panose="02070309020205020404" pitchFamily="49" charset="0"/>
+              </a:rPr>
+              <a:t>&gt; &lt;image-name&gt;</a:t>
+            </a:r>
+          </a:p>
+          <a:p>
+            <a:pPr lvl="1"/>
+            <a:r>
+              <a:rPr lang="de-DE" dirty="0"/>
+              <a:t>Von Grund auf: mit einem </a:t>
+            </a:r>
+            <a:r>
+              <a:rPr lang="de-DE" sz="2000" b="1" dirty="0" err="1">
+                <a:highlight>
+                  <a:srgbClr val="C0C0C0"/>
+                </a:highlight>
+                <a:latin typeface="Courier New" panose="02070309020205020404" pitchFamily="49" charset="0"/>
+                <a:cs typeface="Courier New" panose="02070309020205020404" pitchFamily="49" charset="0"/>
+              </a:rPr>
+              <a:t>Dockerfile</a:t>
+            </a:r>
+            <a:r>
+              <a:rPr lang="de-DE" dirty="0"/>
+              <a:t> und </a:t>
+            </a:r>
+            <a:r>
+              <a:rPr lang="de-DE" sz="2000" b="1" dirty="0" err="1">
+                <a:highlight>
+                  <a:srgbClr val="C0C0C0"/>
+                </a:highlight>
+                <a:latin typeface="Courier New" panose="02070309020205020404" pitchFamily="49" charset="0"/>
+                <a:cs typeface="Courier New" panose="02070309020205020404" pitchFamily="49" charset="0"/>
+              </a:rPr>
+              <a:t>docker</a:t>
+            </a:r>
+            <a:r>
+              <a:rPr lang="de-DE" sz="2000" b="1" dirty="0">
+                <a:highlight>
+                  <a:srgbClr val="C0C0C0"/>
+                </a:highlight>
+                <a:latin typeface="Courier New" panose="02070309020205020404" pitchFamily="49" charset="0"/>
+                <a:cs typeface="Courier New" panose="02070309020205020404" pitchFamily="49" charset="0"/>
+              </a:rPr>
+              <a:t> </a:t>
+            </a:r>
+            <a:r>
+              <a:rPr lang="de-DE" sz="2000" b="1" dirty="0" err="1">
+                <a:highlight>
+                  <a:srgbClr val="C0C0C0"/>
+                </a:highlight>
+                <a:latin typeface="Courier New" panose="02070309020205020404" pitchFamily="49" charset="0"/>
+                <a:cs typeface="Courier New" panose="02070309020205020404" pitchFamily="49" charset="0"/>
+              </a:rPr>
+              <a:t>build</a:t>
+            </a:r>
+            <a:endParaRPr lang="de-DE" sz="2000" b="1" dirty="0">
+              <a:highlight>
+                <a:srgbClr val="C0C0C0"/>
+              </a:highlight>
+              <a:latin typeface="Courier New" panose="02070309020205020404" pitchFamily="49" charset="0"/>
+              <a:cs typeface="Courier New" panose="02070309020205020404" pitchFamily="49" charset="0"/>
+            </a:endParaRPr>
+          </a:p>
+        </p:txBody>
+      </p:sp>
+    </p:spTree>
+    <p:extLst>
+      <p:ext uri="{BB962C8B-B14F-4D97-AF65-F5344CB8AC3E}">
+        <p14:creationId xmlns:p14="http://schemas.microsoft.com/office/powerpoint/2010/main" val="267169117"/>
+      </p:ext>
+    </p:extLst>
+  </p:cSld>
+  <p:clrMapOvr>
+    <a:masterClrMapping/>
+  </p:clrMapOvr>
+</p:sld>
+</file>
+
+<file path=ppt/slides/slide41.xml><?xml version="1.0" encoding="utf-8"?>
 <p:sld xmlns:a="http://schemas.openxmlformats.org/drawingml/2006/main" xmlns:r="http://schemas.openxmlformats.org/officeDocument/2006/relationships" xmlns:p="http://schemas.openxmlformats.org/presentationml/2006/main">
   <p:cSld>
     <p:spTree>
